--- a/slides/velocity-datenbankentwurf.pptx
+++ b/slides/velocity-datenbankentwurf.pptx
@@ -3752,7 +3752,7 @@
           <a:lstStyle/>
           <a:p>
             <a:r>
-              <a:t>Sechs von zehn. Rechts steht schon, wo die Regel später landet — das ist der rote Faden durch die Umsetzung. GR7 bis GR10 folgen im physischen Entwurf.</a:t>
+              <a:t>Sechs von zehn. Rechts steht schon, wo die Regel später landet — das ist der rote Faden durch die Umsetzung. GR7 bis GR12 folgen im physischen Entwurf.</a:t>
             </a:r>
           </a:p>
         </p:txBody>
@@ -15938,7 +15938,7 @@
                   <a:srgbClr val="404040"/>
                 </a:solidFill>
               </a:rPr>
-              <a:t>Aus diesem einen Satz entsteht das gesamte Datenmodell. Jede Frage, die diese Fahrt aufwirft, beantwortet ein Kapitel dieser Einheit — und am Ende steht eine Datenbank, die Annas Rechnung selbst garantiert.</a:t>
+              <a:t>Aus diesem einen Satz entsteht das gesamte Datenmodell. Jede Frage, die diese Fahrt aufwirft, beantwortet ein Kapitel dieser Einheit — und am Ende steht eine Datenbank, die Annas Rechnung selbst berechnet und ihre Regeln erzwingt.</a:t>
             </a:r>
           </a:p>
         </p:txBody>
@@ -21922,7 +21922,7 @@
           <a:lstStyle/>
           <a:p>
             <a:r>
-              <a:t>Sieben von zehn Regeln erzwingt die Datenbank</a:t>
+              <a:t>Neun von zwölf Regeln erzwingt die Datenbank</a:t>
             </a:r>
           </a:p>
         </p:txBody>
@@ -22002,7 +22002,7 @@
                   <a:srgbClr val="404040"/>
                 </a:solidFill>
               </a:rPr>
-              <a:t>Die oberen fünf gelten immer, auch bei direktem SQL-Zugriff. Die unteren zwei nur, wenn man den vorgesehenen Weg nimmt — sie brauchen Kontext, den ein Constraint nicht hat.</a:t>
+              <a:t>Die oberen sechs gelten immer, auch bei direktem SQL-Zugriff. Die unteren drei nur, wenn man den vorgesehenen Weg nimmt — sie brauchen Kontext, den ein Constraint nicht hat.</a:t>
             </a:r>
           </a:p>
         </p:txBody>
@@ -22016,7 +22016,7 @@
         <p:spPr>
           <a:xfrm>
             <a:off x="1153160" y="2362200"/>
-            <a:ext cx="1651000" cy="381000"/>
+            <a:ext cx="1651000" cy="342900"/>
           </a:xfrm>
           <a:prstGeom prst="rect">
             <a:avLst/>
@@ -22072,7 +22072,7 @@
         <p:spPr>
           <a:xfrm>
             <a:off x="2804160" y="2362200"/>
-            <a:ext cx="6604000" cy="381000"/>
+            <a:ext cx="6604000" cy="342900"/>
           </a:xfrm>
           <a:prstGeom prst="rect">
             <a:avLst/>
@@ -22128,7 +22128,7 @@
         <p:spPr>
           <a:xfrm>
             <a:off x="9408160" y="2362200"/>
-            <a:ext cx="3219450" cy="381000"/>
+            <a:ext cx="3219450" cy="342900"/>
           </a:xfrm>
           <a:prstGeom prst="rect">
             <a:avLst/>
@@ -22183,8 +22183,8 @@
         </p:nvSpPr>
         <p:spPr>
           <a:xfrm>
-            <a:off x="1153160" y="2743200"/>
-            <a:ext cx="1651000" cy="381000"/>
+            <a:off x="1153160" y="2705100"/>
+            <a:ext cx="1651000" cy="342900"/>
           </a:xfrm>
           <a:prstGeom prst="rect">
             <a:avLst/>
@@ -22241,8 +22241,8 @@
         </p:nvSpPr>
         <p:spPr>
           <a:xfrm>
-            <a:off x="2804160" y="2743200"/>
-            <a:ext cx="6604000" cy="381000"/>
+            <a:off x="2804160" y="2705100"/>
+            <a:ext cx="6604000" cy="342900"/>
           </a:xfrm>
           <a:prstGeom prst="rect">
             <a:avLst/>
@@ -22299,8 +22299,8 @@
         </p:nvSpPr>
         <p:spPr>
           <a:xfrm>
-            <a:off x="9408160" y="2743200"/>
-            <a:ext cx="3219450" cy="381000"/>
+            <a:off x="9408160" y="2705100"/>
+            <a:ext cx="3219450" cy="342900"/>
           </a:xfrm>
           <a:prstGeom prst="rect">
             <a:avLst/>
@@ -22357,8 +22357,8 @@
         </p:nvSpPr>
         <p:spPr>
           <a:xfrm>
-            <a:off x="1153160" y="3124200"/>
-            <a:ext cx="1651000" cy="381000"/>
+            <a:off x="1153160" y="3048000"/>
+            <a:ext cx="1651000" cy="342900"/>
           </a:xfrm>
           <a:prstGeom prst="rect">
             <a:avLst/>
@@ -22415,8 +22415,8 @@
         </p:nvSpPr>
         <p:spPr>
           <a:xfrm>
-            <a:off x="2804160" y="3124200"/>
-            <a:ext cx="6604000" cy="381000"/>
+            <a:off x="2804160" y="3048000"/>
+            <a:ext cx="6604000" cy="342900"/>
           </a:xfrm>
           <a:prstGeom prst="rect">
             <a:avLst/>
@@ -22474,8 +22474,8 @@
         </p:nvSpPr>
         <p:spPr>
           <a:xfrm>
-            <a:off x="9408160" y="3124200"/>
-            <a:ext cx="3219450" cy="381000"/>
+            <a:off x="9408160" y="3048000"/>
+            <a:ext cx="3219450" cy="342900"/>
           </a:xfrm>
           <a:prstGeom prst="rect">
             <a:avLst/>
@@ -22532,8 +22532,8 @@
         </p:nvSpPr>
         <p:spPr>
           <a:xfrm>
-            <a:off x="1153160" y="3505200"/>
-            <a:ext cx="1651000" cy="381000"/>
+            <a:off x="1153160" y="3390900"/>
+            <a:ext cx="1651000" cy="342900"/>
           </a:xfrm>
           <a:prstGeom prst="rect">
             <a:avLst/>
@@ -22590,8 +22590,8 @@
         </p:nvSpPr>
         <p:spPr>
           <a:xfrm>
-            <a:off x="2804160" y="3505200"/>
-            <a:ext cx="6604000" cy="381000"/>
+            <a:off x="2804160" y="3390900"/>
+            <a:ext cx="6604000" cy="342900"/>
           </a:xfrm>
           <a:prstGeom prst="rect">
             <a:avLst/>
@@ -22648,8 +22648,8 @@
         </p:nvSpPr>
         <p:spPr>
           <a:xfrm>
-            <a:off x="9408160" y="3505200"/>
-            <a:ext cx="3219450" cy="381000"/>
+            <a:off x="9408160" y="3390900"/>
+            <a:ext cx="3219450" cy="342900"/>
           </a:xfrm>
           <a:prstGeom prst="rect">
             <a:avLst/>
@@ -22706,8 +22706,8 @@
         </p:nvSpPr>
         <p:spPr>
           <a:xfrm>
-            <a:off x="1153160" y="3886200"/>
-            <a:ext cx="1651000" cy="381000"/>
+            <a:off x="1153160" y="3733800"/>
+            <a:ext cx="1651000" cy="342900"/>
           </a:xfrm>
           <a:prstGeom prst="rect">
             <a:avLst/>
@@ -22764,8 +22764,8 @@
         </p:nvSpPr>
         <p:spPr>
           <a:xfrm>
-            <a:off x="2804160" y="3886200"/>
-            <a:ext cx="6604000" cy="381000"/>
+            <a:off x="2804160" y="3733800"/>
+            <a:ext cx="6604000" cy="342900"/>
           </a:xfrm>
           <a:prstGeom prst="rect">
             <a:avLst/>
@@ -22823,8 +22823,8 @@
         </p:nvSpPr>
         <p:spPr>
           <a:xfrm>
-            <a:off x="9408160" y="3886200"/>
-            <a:ext cx="3219450" cy="381000"/>
+            <a:off x="9408160" y="3733800"/>
+            <a:ext cx="3219450" cy="342900"/>
           </a:xfrm>
           <a:prstGeom prst="rect">
             <a:avLst/>
@@ -22881,8 +22881,8 @@
         </p:nvSpPr>
         <p:spPr>
           <a:xfrm>
-            <a:off x="1153160" y="4267200"/>
-            <a:ext cx="1651000" cy="381000"/>
+            <a:off x="1153160" y="4076700"/>
+            <a:ext cx="1651000" cy="342900"/>
           </a:xfrm>
           <a:prstGeom prst="rect">
             <a:avLst/>
@@ -22939,8 +22939,8 @@
         </p:nvSpPr>
         <p:spPr>
           <a:xfrm>
-            <a:off x="2804160" y="4267200"/>
-            <a:ext cx="6604000" cy="381000"/>
+            <a:off x="2804160" y="4076700"/>
+            <a:ext cx="6604000" cy="342900"/>
           </a:xfrm>
           <a:prstGeom prst="rect">
             <a:avLst/>
@@ -22997,8 +22997,8 @@
         </p:nvSpPr>
         <p:spPr>
           <a:xfrm>
-            <a:off x="9408160" y="4267200"/>
-            <a:ext cx="3219450" cy="381000"/>
+            <a:off x="9408160" y="4076700"/>
+            <a:ext cx="3219450" cy="342900"/>
           </a:xfrm>
           <a:prstGeom prst="rect">
             <a:avLst/>
@@ -23055,8 +23055,8 @@
         </p:nvSpPr>
         <p:spPr>
           <a:xfrm>
-            <a:off x="1153160" y="4648200"/>
-            <a:ext cx="1651000" cy="381000"/>
+            <a:off x="1153160" y="4419600"/>
+            <a:ext cx="1651000" cy="342900"/>
           </a:xfrm>
           <a:prstGeom prst="rect">
             <a:avLst/>
@@ -23100,7 +23100,7 @@
                   <a:srgbClr val="003E6E"/>
                 </a:solidFill>
               </a:rPr>
-              <a:t>GR2, GR5</a:t>
+              <a:t>GR11</a:t>
             </a:r>
           </a:p>
         </p:txBody>
@@ -23113,8 +23113,8 @@
         </p:nvSpPr>
         <p:spPr>
           <a:xfrm>
-            <a:off x="2804160" y="4648200"/>
-            <a:ext cx="6604000" cy="381000"/>
+            <a:off x="2804160" y="4419600"/>
+            <a:ext cx="6604000" cy="342900"/>
           </a:xfrm>
           <a:prstGeom prst="rect">
             <a:avLst/>
@@ -23157,8 +23157,9 @@
                 <a:solidFill>
                   <a:srgbClr val="404040"/>
                 </a:solidFill>
-              </a:rPr>
-              <a:t>Prüfung in fn_ausleihe_starten und _beenden</a:t>
+                <a:latin typeface="Consolas"/>
+              </a:rPr>
+              <a:t>CHECK: Station oder Koordinaten, nie beides</a:t>
             </a:r>
           </a:p>
         </p:txBody>
@@ -23171,8 +23172,8 @@
         </p:nvSpPr>
         <p:spPr>
           <a:xfrm>
-            <a:off x="9408160" y="4648200"/>
-            <a:ext cx="3219450" cy="381000"/>
+            <a:off x="9408160" y="4419600"/>
+            <a:ext cx="3219450" cy="342900"/>
           </a:xfrm>
           <a:prstGeom prst="rect">
             <a:avLst/>
@@ -23216,7 +23217,7 @@
                   <a:srgbClr val="404040"/>
                 </a:solidFill>
               </a:rPr>
-              <a:t>nur über die Funktion</a:t>
+              <a:t>immer</a:t>
             </a:r>
           </a:p>
         </p:txBody>
@@ -23229,8 +23230,8 @@
         </p:nvSpPr>
         <p:spPr>
           <a:xfrm>
-            <a:off x="1153160" y="5029200"/>
-            <a:ext cx="1651000" cy="381000"/>
+            <a:off x="1153160" y="4762500"/>
+            <a:ext cx="1651000" cy="342900"/>
           </a:xfrm>
           <a:prstGeom prst="rect">
             <a:avLst/>
@@ -23274,7 +23275,7 @@
                   <a:srgbClr val="003E6E"/>
                 </a:solidFill>
               </a:rPr>
-              <a:t>GR8, GR9</a:t>
+              <a:t>GR2, GR5</a:t>
             </a:r>
           </a:p>
         </p:txBody>
@@ -23287,8 +23288,8 @@
         </p:nvSpPr>
         <p:spPr>
           <a:xfrm>
-            <a:off x="2804160" y="5029200"/>
-            <a:ext cx="6604000" cy="381000"/>
+            <a:off x="2804160" y="4762500"/>
+            <a:ext cx="6604000" cy="342900"/>
           </a:xfrm>
           <a:prstGeom prst="rect">
             <a:avLst/>
@@ -23332,7 +23333,7 @@
                   <a:srgbClr val="404040"/>
                 </a:solidFill>
               </a:rPr>
-              <a:t>Prüfung in der api_-Schicht</a:t>
+              <a:t>Prüfung in fn_ausleihe_starten und _beenden</a:t>
             </a:r>
           </a:p>
         </p:txBody>
@@ -23345,8 +23346,356 @@
         </p:nvSpPr>
         <p:spPr>
           <a:xfrm>
-            <a:off x="9408160" y="5029200"/>
-            <a:ext cx="3219450" cy="381000"/>
+            <a:off x="9408160" y="4762500"/>
+            <a:ext cx="3219450" cy="342900"/>
+          </a:xfrm>
+          <a:prstGeom prst="rect">
+            <a:avLst/>
+          </a:prstGeom>
+          <a:solidFill>
+            <a:srgbClr val="F7F5EF"/>
+          </a:solidFill>
+          <a:ln w="6350">
+            <a:solidFill>
+              <a:srgbClr val="C9C3B4"/>
+            </a:solidFill>
+          </a:ln>
+          <a:effectLst/>
+        </p:spPr>
+        <p:style>
+          <a:lnRef idx="1">
+            <a:schemeClr val="accent1"/>
+          </a:lnRef>
+          <a:fillRef idx="3">
+            <a:schemeClr val="accent1"/>
+          </a:fillRef>
+          <a:effectRef idx="2">
+            <a:schemeClr val="accent1"/>
+          </a:effectRef>
+          <a:fontRef idx="minor">
+            <a:schemeClr val="lt1"/>
+          </a:fontRef>
+        </p:style>
+        <p:txBody>
+          <a:bodyPr rtlCol="0" anchor="ctr" wrap="square" lIns="101600" tIns="38100" rIns="101600" bIns="38100"/>
+          <a:lstStyle/>
+          <a:p>
+            <a:pPr algn="l">
+              <a:lnSpc>
+                <a:spcPct val="95000"/>
+              </a:lnSpc>
+            </a:pPr>
+            <a:r>
+              <a:rPr sz="1300" b="0">
+                <a:solidFill>
+                  <a:srgbClr val="404040"/>
+                </a:solidFill>
+              </a:rPr>
+              <a:t>nur über die Funktion</a:t>
+            </a:r>
+          </a:p>
+        </p:txBody>
+      </p:sp>
+      <p:sp>
+        <p:nvSpPr>
+          <p:cNvPr id="30" name="Rectangle 29"/>
+          <p:cNvSpPr/>
+          <p:nvPr/>
+        </p:nvSpPr>
+        <p:spPr>
+          <a:xfrm>
+            <a:off x="1153160" y="5105400"/>
+            <a:ext cx="1651000" cy="342900"/>
+          </a:xfrm>
+          <a:prstGeom prst="rect">
+            <a:avLst/>
+          </a:prstGeom>
+          <a:solidFill>
+            <a:srgbClr val="E3DED1"/>
+          </a:solidFill>
+          <a:ln w="6350">
+            <a:solidFill>
+              <a:srgbClr val="C9C3B4"/>
+            </a:solidFill>
+          </a:ln>
+          <a:effectLst/>
+        </p:spPr>
+        <p:style>
+          <a:lnRef idx="1">
+            <a:schemeClr val="accent1"/>
+          </a:lnRef>
+          <a:fillRef idx="3">
+            <a:schemeClr val="accent1"/>
+          </a:fillRef>
+          <a:effectRef idx="2">
+            <a:schemeClr val="accent1"/>
+          </a:effectRef>
+          <a:fontRef idx="minor">
+            <a:schemeClr val="lt1"/>
+          </a:fontRef>
+        </p:style>
+        <p:txBody>
+          <a:bodyPr rtlCol="0" anchor="ctr" wrap="square" lIns="101600" tIns="38100" rIns="101600" bIns="38100"/>
+          <a:lstStyle/>
+          <a:p>
+            <a:pPr algn="l">
+              <a:lnSpc>
+                <a:spcPct val="95000"/>
+              </a:lnSpc>
+            </a:pPr>
+            <a:r>
+              <a:rPr sz="1300" b="1">
+                <a:solidFill>
+                  <a:srgbClr val="003E6E"/>
+                </a:solidFill>
+              </a:rPr>
+              <a:t>GR8, GR9</a:t>
+            </a:r>
+          </a:p>
+        </p:txBody>
+      </p:sp>
+      <p:sp>
+        <p:nvSpPr>
+          <p:cNvPr id="31" name="Rectangle 30"/>
+          <p:cNvSpPr/>
+          <p:nvPr/>
+        </p:nvSpPr>
+        <p:spPr>
+          <a:xfrm>
+            <a:off x="2804160" y="5105400"/>
+            <a:ext cx="6604000" cy="342900"/>
+          </a:xfrm>
+          <a:prstGeom prst="rect">
+            <a:avLst/>
+          </a:prstGeom>
+          <a:solidFill>
+            <a:srgbClr val="E3DED1"/>
+          </a:solidFill>
+          <a:ln w="6350">
+            <a:solidFill>
+              <a:srgbClr val="C9C3B4"/>
+            </a:solidFill>
+          </a:ln>
+          <a:effectLst/>
+        </p:spPr>
+        <p:style>
+          <a:lnRef idx="1">
+            <a:schemeClr val="accent1"/>
+          </a:lnRef>
+          <a:fillRef idx="3">
+            <a:schemeClr val="accent1"/>
+          </a:fillRef>
+          <a:effectRef idx="2">
+            <a:schemeClr val="accent1"/>
+          </a:effectRef>
+          <a:fontRef idx="minor">
+            <a:schemeClr val="lt1"/>
+          </a:fontRef>
+        </p:style>
+        <p:txBody>
+          <a:bodyPr rtlCol="0" anchor="ctr" wrap="square" lIns="101600" tIns="38100" rIns="101600" bIns="38100"/>
+          <a:lstStyle/>
+          <a:p>
+            <a:pPr algn="l">
+              <a:lnSpc>
+                <a:spcPct val="95000"/>
+              </a:lnSpc>
+            </a:pPr>
+            <a:r>
+              <a:rPr sz="1300" b="0">
+                <a:solidFill>
+                  <a:srgbClr val="404040"/>
+                </a:solidFill>
+              </a:rPr>
+              <a:t>Prüfung in der api_-Schicht</a:t>
+            </a:r>
+          </a:p>
+        </p:txBody>
+      </p:sp>
+      <p:sp>
+        <p:nvSpPr>
+          <p:cNvPr id="32" name="Rectangle 31"/>
+          <p:cNvSpPr/>
+          <p:nvPr/>
+        </p:nvSpPr>
+        <p:spPr>
+          <a:xfrm>
+            <a:off x="9408160" y="5105400"/>
+            <a:ext cx="3219450" cy="342900"/>
+          </a:xfrm>
+          <a:prstGeom prst="rect">
+            <a:avLst/>
+          </a:prstGeom>
+          <a:solidFill>
+            <a:srgbClr val="E3DED1"/>
+          </a:solidFill>
+          <a:ln w="6350">
+            <a:solidFill>
+              <a:srgbClr val="C9C3B4"/>
+            </a:solidFill>
+          </a:ln>
+          <a:effectLst/>
+        </p:spPr>
+        <p:style>
+          <a:lnRef idx="1">
+            <a:schemeClr val="accent1"/>
+          </a:lnRef>
+          <a:fillRef idx="3">
+            <a:schemeClr val="accent1"/>
+          </a:fillRef>
+          <a:effectRef idx="2">
+            <a:schemeClr val="accent1"/>
+          </a:effectRef>
+          <a:fontRef idx="minor">
+            <a:schemeClr val="lt1"/>
+          </a:fontRef>
+        </p:style>
+        <p:txBody>
+          <a:bodyPr rtlCol="0" anchor="ctr" wrap="square" lIns="101600" tIns="38100" rIns="101600" bIns="38100"/>
+          <a:lstStyle/>
+          <a:p>
+            <a:pPr algn="l">
+              <a:lnSpc>
+                <a:spcPct val="95000"/>
+              </a:lnSpc>
+            </a:pPr>
+            <a:r>
+              <a:rPr sz="1300" b="0">
+                <a:solidFill>
+                  <a:srgbClr val="404040"/>
+                </a:solidFill>
+              </a:rPr>
+              <a:t>nur über die Funktion</a:t>
+            </a:r>
+          </a:p>
+        </p:txBody>
+      </p:sp>
+      <p:sp>
+        <p:nvSpPr>
+          <p:cNvPr id="33" name="Rectangle 32"/>
+          <p:cNvSpPr/>
+          <p:nvPr/>
+        </p:nvSpPr>
+        <p:spPr>
+          <a:xfrm>
+            <a:off x="1153160" y="5448300"/>
+            <a:ext cx="1651000" cy="342900"/>
+          </a:xfrm>
+          <a:prstGeom prst="rect">
+            <a:avLst/>
+          </a:prstGeom>
+          <a:solidFill>
+            <a:srgbClr val="F7F5EF"/>
+          </a:solidFill>
+          <a:ln w="6350">
+            <a:solidFill>
+              <a:srgbClr val="C9C3B4"/>
+            </a:solidFill>
+          </a:ln>
+          <a:effectLst/>
+        </p:spPr>
+        <p:style>
+          <a:lnRef idx="1">
+            <a:schemeClr val="accent1"/>
+          </a:lnRef>
+          <a:fillRef idx="3">
+            <a:schemeClr val="accent1"/>
+          </a:fillRef>
+          <a:effectRef idx="2">
+            <a:schemeClr val="accent1"/>
+          </a:effectRef>
+          <a:fontRef idx="minor">
+            <a:schemeClr val="lt1"/>
+          </a:fontRef>
+        </p:style>
+        <p:txBody>
+          <a:bodyPr rtlCol="0" anchor="ctr" wrap="square" lIns="101600" tIns="38100" rIns="101600" bIns="38100"/>
+          <a:lstStyle/>
+          <a:p>
+            <a:pPr algn="l">
+              <a:lnSpc>
+                <a:spcPct val="95000"/>
+              </a:lnSpc>
+            </a:pPr>
+            <a:r>
+              <a:rPr sz="1300" b="1">
+                <a:solidFill>
+                  <a:srgbClr val="003E6E"/>
+                </a:solidFill>
+              </a:rPr>
+              <a:t>GR12</a:t>
+            </a:r>
+          </a:p>
+        </p:txBody>
+      </p:sp>
+      <p:sp>
+        <p:nvSpPr>
+          <p:cNvPr id="34" name="Rectangle 33"/>
+          <p:cNvSpPr/>
+          <p:nvPr/>
+        </p:nvSpPr>
+        <p:spPr>
+          <a:xfrm>
+            <a:off x="2804160" y="5448300"/>
+            <a:ext cx="6604000" cy="342900"/>
+          </a:xfrm>
+          <a:prstGeom prst="rect">
+            <a:avLst/>
+          </a:prstGeom>
+          <a:solidFill>
+            <a:srgbClr val="F7F5EF"/>
+          </a:solidFill>
+          <a:ln w="6350">
+            <a:solidFill>
+              <a:srgbClr val="C9C3B4"/>
+            </a:solidFill>
+          </a:ln>
+          <a:effectLst/>
+        </p:spPr>
+        <p:style>
+          <a:lnRef idx="1">
+            <a:schemeClr val="accent1"/>
+          </a:lnRef>
+          <a:fillRef idx="3">
+            <a:schemeClr val="accent1"/>
+          </a:fillRef>
+          <a:effectRef idx="2">
+            <a:schemeClr val="accent1"/>
+          </a:effectRef>
+          <a:fontRef idx="minor">
+            <a:schemeClr val="lt1"/>
+          </a:fontRef>
+        </p:style>
+        <p:txBody>
+          <a:bodyPr rtlCol="0" anchor="ctr" wrap="square" lIns="101600" tIns="38100" rIns="101600" bIns="38100"/>
+          <a:lstStyle/>
+          <a:p>
+            <a:pPr algn="l">
+              <a:lnSpc>
+                <a:spcPct val="95000"/>
+              </a:lnSpc>
+            </a:pPr>
+            <a:r>
+              <a:rPr sz="1300" b="0">
+                <a:solidFill>
+                  <a:srgbClr val="404040"/>
+                </a:solidFill>
+              </a:rPr>
+              <a:t>Prüfung in fn_ausleihe_starten</a:t>
+            </a:r>
+          </a:p>
+        </p:txBody>
+      </p:sp>
+      <p:sp>
+        <p:nvSpPr>
+          <p:cNvPr id="35" name="Rectangle 34"/>
+          <p:cNvSpPr/>
+          <p:nvPr/>
+        </p:nvSpPr>
+        <p:spPr>
+          <a:xfrm>
+            <a:off x="9408160" y="5448300"/>
+            <a:ext cx="3219450" cy="342900"/>
           </a:xfrm>
           <a:prstGeom prst="rect">
             <a:avLst/>
@@ -28314,7 +28663,7 @@
                   <a:srgbClr val="404040"/>
                 </a:solidFill>
               </a:rPr>
-              <a:t>− 0,00</a:t>
+              <a:t>- 0,00</a:t>
             </a:r>
           </a:p>
         </p:txBody>
@@ -28604,7 +28953,7 @@
                   <a:srgbClr val="404040"/>
                 </a:solidFill>
               </a:rPr>
-              <a:t>− 1,24</a:t>
+              <a:t>- 1,24</a:t>
             </a:r>
           </a:p>
         </p:txBody>
@@ -28894,7 +29243,7 @@
                   <a:srgbClr val="404040"/>
                 </a:solidFill>
               </a:rPr>
-              <a:t>− 0,00</a:t>
+              <a:t>- 0,00</a:t>
             </a:r>
           </a:p>
         </p:txBody>
@@ -29032,7 +29381,7 @@
                   <a:srgbClr val="003E6E"/>
                 </a:solidFill>
               </a:rPr>
-              <a:t>6,20 − 1,24 = 4,96 Euro. Reihenfolge: Rabatt VOR der Kappung — umgekehrt käme 4,00 heraus, weil der Rabatt den bereits gedeckelten Betrag ein zweites Mal senken würde.</a:t>
+              <a:t>6,20 - 1,24 = 4,96 Euro. Reihenfolge: Rabatt VOR der Kappung — umgekehrt käme 4,00 heraus, weil der Rabatt den bereits gedeckelten Betrag ein zweites Mal senken würde.</a:t>
             </a:r>
           </a:p>
         </p:txBody>

--- a/slides/velocity-datenbankentwurf.pptx
+++ b/slides/velocity-datenbankentwurf.pptx
@@ -3752,7 +3752,7 @@
           <a:lstStyle/>
           <a:p>
             <a:r>
-              <a:t>Sechs von zehn. Rechts steht schon, wo die Regel später landet — das ist der rote Faden durch die Umsetzung. GR7 bis GR12 folgen im physischen Entwurf.</a:t>
+              <a:t>Sechs von zehn. Rechts steht schon, wo die Regel später landet — das ist der rote Faden durch die Umsetzung. GR7 bis GR13 folgen im physischen Entwurf.</a:t>
             </a:r>
           </a:p>
         </p:txBody>
@@ -21922,7 +21922,7 @@
           <a:lstStyle/>
           <a:p>
             <a:r>
-              <a:t>Neun von zwölf Regeln erzwingt die Datenbank</a:t>
+              <a:t>Neun von dreizehn Regeln erzwingt die Datenbank</a:t>
             </a:r>
           </a:p>
         </p:txBody>
@@ -22002,7 +22002,7 @@
                   <a:srgbClr val="404040"/>
                 </a:solidFill>
               </a:rPr>
-              <a:t>Die oberen sechs gelten immer, auch bei direktem SQL-Zugriff. Die unteren drei nur, wenn man den vorgesehenen Weg nimmt — sie brauchen Kontext, den ein Constraint nicht hat.</a:t>
+              <a:t>Die oberen sieben gelten immer, auch bei direktem SQL-Zugriff. Die unteren drei nur, wenn man den vorgesehenen Weg nimmt — sie brauchen Kontext, den ein Constraint nicht hat.</a:t>
             </a:r>
           </a:p>
         </p:txBody>
@@ -23275,7 +23275,7 @@
                   <a:srgbClr val="003E6E"/>
                 </a:solidFill>
               </a:rPr>
-              <a:t>GR2, GR5</a:t>
+              <a:t>GR13</a:t>
             </a:r>
           </a:p>
         </p:txBody>
@@ -23332,8 +23332,9 @@
                 <a:solidFill>
                   <a:srgbClr val="404040"/>
                 </a:solidFill>
-              </a:rPr>
-              <a:t>Prüfung in fn_ausleihe_starten und _beenden</a:t>
+                <a:latin typeface="Consolas"/>
+              </a:rPr>
+              <a:t>CHECK + Constraint-Trigger (braucht den Radstatus)</a:t>
             </a:r>
           </a:p>
         </p:txBody>
@@ -23391,7 +23392,7 @@
                   <a:srgbClr val="404040"/>
                 </a:solidFill>
               </a:rPr>
-              <a:t>nur über die Funktion</a:t>
+              <a:t>immer</a:t>
             </a:r>
           </a:p>
         </p:txBody>
@@ -23449,7 +23450,7 @@
                   <a:srgbClr val="003E6E"/>
                 </a:solidFill>
               </a:rPr>
-              <a:t>GR8, GR9</a:t>
+              <a:t>GR2, GR5</a:t>
             </a:r>
           </a:p>
         </p:txBody>
@@ -23507,7 +23508,7 @@
                   <a:srgbClr val="404040"/>
                 </a:solidFill>
               </a:rPr>
-              <a:t>Prüfung in der api_-Schicht</a:t>
+              <a:t>Prüfung in fn_ausleihe_starten und _beenden</a:t>
             </a:r>
           </a:p>
         </p:txBody>
@@ -23623,7 +23624,7 @@
                   <a:srgbClr val="003E6E"/>
                 </a:solidFill>
               </a:rPr>
-              <a:t>GR12</a:t>
+              <a:t>GR8, GR9</a:t>
             </a:r>
           </a:p>
         </p:txBody>
@@ -23681,7 +23682,7 @@
                   <a:srgbClr val="404040"/>
                 </a:solidFill>
               </a:rPr>
-              <a:t>Prüfung in fn_ausleihe_starten</a:t>
+              <a:t>Prüfung in der api_-Schicht</a:t>
             </a:r>
           </a:p>
         </p:txBody>
@@ -23702,6 +23703,180 @@
           </a:prstGeom>
           <a:solidFill>
             <a:srgbClr val="F7F5EF"/>
+          </a:solidFill>
+          <a:ln w="6350">
+            <a:solidFill>
+              <a:srgbClr val="C9C3B4"/>
+            </a:solidFill>
+          </a:ln>
+          <a:effectLst/>
+        </p:spPr>
+        <p:style>
+          <a:lnRef idx="1">
+            <a:schemeClr val="accent1"/>
+          </a:lnRef>
+          <a:fillRef idx="3">
+            <a:schemeClr val="accent1"/>
+          </a:fillRef>
+          <a:effectRef idx="2">
+            <a:schemeClr val="accent1"/>
+          </a:effectRef>
+          <a:fontRef idx="minor">
+            <a:schemeClr val="lt1"/>
+          </a:fontRef>
+        </p:style>
+        <p:txBody>
+          <a:bodyPr rtlCol="0" anchor="ctr" wrap="square" lIns="101600" tIns="38100" rIns="101600" bIns="38100"/>
+          <a:lstStyle/>
+          <a:p>
+            <a:pPr algn="l">
+              <a:lnSpc>
+                <a:spcPct val="95000"/>
+              </a:lnSpc>
+            </a:pPr>
+            <a:r>
+              <a:rPr sz="1300" b="0">
+                <a:solidFill>
+                  <a:srgbClr val="404040"/>
+                </a:solidFill>
+              </a:rPr>
+              <a:t>nur über die Funktion</a:t>
+            </a:r>
+          </a:p>
+        </p:txBody>
+      </p:sp>
+      <p:sp>
+        <p:nvSpPr>
+          <p:cNvPr id="36" name="Rectangle 35"/>
+          <p:cNvSpPr/>
+          <p:nvPr/>
+        </p:nvSpPr>
+        <p:spPr>
+          <a:xfrm>
+            <a:off x="1153160" y="5791200"/>
+            <a:ext cx="1651000" cy="342900"/>
+          </a:xfrm>
+          <a:prstGeom prst="rect">
+            <a:avLst/>
+          </a:prstGeom>
+          <a:solidFill>
+            <a:srgbClr val="E3DED1"/>
+          </a:solidFill>
+          <a:ln w="6350">
+            <a:solidFill>
+              <a:srgbClr val="C9C3B4"/>
+            </a:solidFill>
+          </a:ln>
+          <a:effectLst/>
+        </p:spPr>
+        <p:style>
+          <a:lnRef idx="1">
+            <a:schemeClr val="accent1"/>
+          </a:lnRef>
+          <a:fillRef idx="3">
+            <a:schemeClr val="accent1"/>
+          </a:fillRef>
+          <a:effectRef idx="2">
+            <a:schemeClr val="accent1"/>
+          </a:effectRef>
+          <a:fontRef idx="minor">
+            <a:schemeClr val="lt1"/>
+          </a:fontRef>
+        </p:style>
+        <p:txBody>
+          <a:bodyPr rtlCol="0" anchor="ctr" wrap="square" lIns="101600" tIns="38100" rIns="101600" bIns="38100"/>
+          <a:lstStyle/>
+          <a:p>
+            <a:pPr algn="l">
+              <a:lnSpc>
+                <a:spcPct val="95000"/>
+              </a:lnSpc>
+            </a:pPr>
+            <a:r>
+              <a:rPr sz="1300" b="1">
+                <a:solidFill>
+                  <a:srgbClr val="003E6E"/>
+                </a:solidFill>
+              </a:rPr>
+              <a:t>GR12</a:t>
+            </a:r>
+          </a:p>
+        </p:txBody>
+      </p:sp>
+      <p:sp>
+        <p:nvSpPr>
+          <p:cNvPr id="37" name="Rectangle 36"/>
+          <p:cNvSpPr/>
+          <p:nvPr/>
+        </p:nvSpPr>
+        <p:spPr>
+          <a:xfrm>
+            <a:off x="2804160" y="5791200"/>
+            <a:ext cx="6604000" cy="342900"/>
+          </a:xfrm>
+          <a:prstGeom prst="rect">
+            <a:avLst/>
+          </a:prstGeom>
+          <a:solidFill>
+            <a:srgbClr val="E3DED1"/>
+          </a:solidFill>
+          <a:ln w="6350">
+            <a:solidFill>
+              <a:srgbClr val="C9C3B4"/>
+            </a:solidFill>
+          </a:ln>
+          <a:effectLst/>
+        </p:spPr>
+        <p:style>
+          <a:lnRef idx="1">
+            <a:schemeClr val="accent1"/>
+          </a:lnRef>
+          <a:fillRef idx="3">
+            <a:schemeClr val="accent1"/>
+          </a:fillRef>
+          <a:effectRef idx="2">
+            <a:schemeClr val="accent1"/>
+          </a:effectRef>
+          <a:fontRef idx="minor">
+            <a:schemeClr val="lt1"/>
+          </a:fontRef>
+        </p:style>
+        <p:txBody>
+          <a:bodyPr rtlCol="0" anchor="ctr" wrap="square" lIns="101600" tIns="38100" rIns="101600" bIns="38100"/>
+          <a:lstStyle/>
+          <a:p>
+            <a:pPr algn="l">
+              <a:lnSpc>
+                <a:spcPct val="95000"/>
+              </a:lnSpc>
+            </a:pPr>
+            <a:r>
+              <a:rPr sz="1300" b="0">
+                <a:solidFill>
+                  <a:srgbClr val="404040"/>
+                </a:solidFill>
+              </a:rPr>
+              <a:t>Prüfung in fn_ausleihe_starten</a:t>
+            </a:r>
+          </a:p>
+        </p:txBody>
+      </p:sp>
+      <p:sp>
+        <p:nvSpPr>
+          <p:cNvPr id="38" name="Rectangle 37"/>
+          <p:cNvSpPr/>
+          <p:nvPr/>
+        </p:nvSpPr>
+        <p:spPr>
+          <a:xfrm>
+            <a:off x="9408160" y="5791200"/>
+            <a:ext cx="3219450" cy="342900"/>
+          </a:xfrm>
+          <a:prstGeom prst="rect">
+            <a:avLst/>
+          </a:prstGeom>
+          <a:solidFill>
+            <a:srgbClr val="E3DED1"/>
           </a:solidFill>
           <a:ln w="6350">
             <a:solidFill>

--- a/slides/velocity-datenbankentwurf.pptx
+++ b/slides/velocity-datenbankentwurf.pptx
@@ -36744,7 +36744,7 @@
                   <a:srgbClr val="404040"/>
                 </a:solidFill>
               </a:rPr>
-              <a:t>Frei im Stadtgebiet gegen Zuschlag</a:t>
+              <a:t>Frei im Stadtgebiet, ohne Zuschlag</a:t>
             </a:r>
           </a:p>
           <a:p>

--- a/slides/velocity-datenbankentwurf.pptx
+++ b/slides/velocity-datenbankentwurf.pptx
@@ -3752,7 +3752,7 @@
           <a:lstStyle/>
           <a:p>
             <a:r>
-              <a:t>Sechs von zehn. Rechts steht schon, wo die Regel später landet — das ist der rote Faden durch die Umsetzung. GR7 bis GR13 folgen im physischen Entwurf.</a:t>
+              <a:t>Sechs von zehn. Rechts steht schon, wo die Regel später landet — das ist der rote Faden durch die Umsetzung. GR7 bis GR15 folgen im physischen Entwurf.</a:t>
             </a:r>
           </a:p>
         </p:txBody>
@@ -21922,7 +21922,7 @@
           <a:lstStyle/>
           <a:p>
             <a:r>
-              <a:t>Neun von dreizehn Regeln erzwingt die Datenbank</a:t>
+              <a:t>Zehn von fünfzehn Regeln erzwingt die Datenbank</a:t>
             </a:r>
           </a:p>
         </p:txBody>
@@ -22002,7 +22002,7 @@
                   <a:srgbClr val="404040"/>
                 </a:solidFill>
               </a:rPr>
-              <a:t>Die oberen sieben gelten immer, auch bei direktem SQL-Zugriff. Die unteren drei nur, wenn man den vorgesehenen Weg nimmt — sie brauchen Kontext, den ein Constraint nicht hat.</a:t>
+              <a:t>Die oberen acht gelten immer, auch bei direktem SQL-Zugriff. Die unteren vier nur, wenn man den vorgesehenen Weg nimmt — sie brauchen Kontext, den ein Constraint nicht hat.</a:t>
             </a:r>
           </a:p>
         </p:txBody>
@@ -22015,8 +22015,8 @@
         </p:nvSpPr>
         <p:spPr>
           <a:xfrm>
-            <a:off x="1153160" y="2362200"/>
-            <a:ext cx="1651000" cy="342900"/>
+            <a:off x="1153160" y="2235200"/>
+            <a:ext cx="1651000" cy="304800"/>
           </a:xfrm>
           <a:prstGeom prst="rect">
             <a:avLst/>
@@ -22071,8 +22071,8 @@
         </p:nvSpPr>
         <p:spPr>
           <a:xfrm>
-            <a:off x="2804160" y="2362200"/>
-            <a:ext cx="6604000" cy="342900"/>
+            <a:off x="2804160" y="2235200"/>
+            <a:ext cx="6604000" cy="304800"/>
           </a:xfrm>
           <a:prstGeom prst="rect">
             <a:avLst/>
@@ -22127,8 +22127,8 @@
         </p:nvSpPr>
         <p:spPr>
           <a:xfrm>
-            <a:off x="9408160" y="2362200"/>
-            <a:ext cx="3219450" cy="342900"/>
+            <a:off x="9408160" y="2235200"/>
+            <a:ext cx="3219450" cy="304800"/>
           </a:xfrm>
           <a:prstGeom prst="rect">
             <a:avLst/>
@@ -22183,8 +22183,8 @@
         </p:nvSpPr>
         <p:spPr>
           <a:xfrm>
-            <a:off x="1153160" y="2705100"/>
-            <a:ext cx="1651000" cy="342900"/>
+            <a:off x="1153160" y="2540000"/>
+            <a:ext cx="1651000" cy="304800"/>
           </a:xfrm>
           <a:prstGeom prst="rect">
             <a:avLst/>
@@ -22241,8 +22241,8 @@
         </p:nvSpPr>
         <p:spPr>
           <a:xfrm>
-            <a:off x="2804160" y="2705100"/>
-            <a:ext cx="6604000" cy="342900"/>
+            <a:off x="2804160" y="2540000"/>
+            <a:ext cx="6604000" cy="304800"/>
           </a:xfrm>
           <a:prstGeom prst="rect">
             <a:avLst/>
@@ -22299,8 +22299,8 @@
         </p:nvSpPr>
         <p:spPr>
           <a:xfrm>
-            <a:off x="9408160" y="2705100"/>
-            <a:ext cx="3219450" cy="342900"/>
+            <a:off x="9408160" y="2540000"/>
+            <a:ext cx="3219450" cy="304800"/>
           </a:xfrm>
           <a:prstGeom prst="rect">
             <a:avLst/>
@@ -22357,8 +22357,8 @@
         </p:nvSpPr>
         <p:spPr>
           <a:xfrm>
-            <a:off x="1153160" y="3048000"/>
-            <a:ext cx="1651000" cy="342900"/>
+            <a:off x="1153160" y="2844800"/>
+            <a:ext cx="1651000" cy="304800"/>
           </a:xfrm>
           <a:prstGeom prst="rect">
             <a:avLst/>
@@ -22415,8 +22415,8 @@
         </p:nvSpPr>
         <p:spPr>
           <a:xfrm>
-            <a:off x="2804160" y="3048000"/>
-            <a:ext cx="6604000" cy="342900"/>
+            <a:off x="2804160" y="2844800"/>
+            <a:ext cx="6604000" cy="304800"/>
           </a:xfrm>
           <a:prstGeom prst="rect">
             <a:avLst/>
@@ -22474,8 +22474,8 @@
         </p:nvSpPr>
         <p:spPr>
           <a:xfrm>
-            <a:off x="9408160" y="3048000"/>
-            <a:ext cx="3219450" cy="342900"/>
+            <a:off x="9408160" y="2844800"/>
+            <a:ext cx="3219450" cy="304800"/>
           </a:xfrm>
           <a:prstGeom prst="rect">
             <a:avLst/>
@@ -22532,8 +22532,8 @@
         </p:nvSpPr>
         <p:spPr>
           <a:xfrm>
-            <a:off x="1153160" y="3390900"/>
-            <a:ext cx="1651000" cy="342900"/>
+            <a:off x="1153160" y="3149600"/>
+            <a:ext cx="1651000" cy="304800"/>
           </a:xfrm>
           <a:prstGeom prst="rect">
             <a:avLst/>
@@ -22590,8 +22590,8 @@
         </p:nvSpPr>
         <p:spPr>
           <a:xfrm>
-            <a:off x="2804160" y="3390900"/>
-            <a:ext cx="6604000" cy="342900"/>
+            <a:off x="2804160" y="3149600"/>
+            <a:ext cx="6604000" cy="304800"/>
           </a:xfrm>
           <a:prstGeom prst="rect">
             <a:avLst/>
@@ -22648,8 +22648,8 @@
         </p:nvSpPr>
         <p:spPr>
           <a:xfrm>
-            <a:off x="9408160" y="3390900"/>
-            <a:ext cx="3219450" cy="342900"/>
+            <a:off x="9408160" y="3149600"/>
+            <a:ext cx="3219450" cy="304800"/>
           </a:xfrm>
           <a:prstGeom prst="rect">
             <a:avLst/>
@@ -22706,8 +22706,8 @@
         </p:nvSpPr>
         <p:spPr>
           <a:xfrm>
-            <a:off x="1153160" y="3733800"/>
-            <a:ext cx="1651000" cy="342900"/>
+            <a:off x="1153160" y="3454400"/>
+            <a:ext cx="1651000" cy="304800"/>
           </a:xfrm>
           <a:prstGeom prst="rect">
             <a:avLst/>
@@ -22764,8 +22764,8 @@
         </p:nvSpPr>
         <p:spPr>
           <a:xfrm>
-            <a:off x="2804160" y="3733800"/>
-            <a:ext cx="6604000" cy="342900"/>
+            <a:off x="2804160" y="3454400"/>
+            <a:ext cx="6604000" cy="304800"/>
           </a:xfrm>
           <a:prstGeom prst="rect">
             <a:avLst/>
@@ -22823,8 +22823,8 @@
         </p:nvSpPr>
         <p:spPr>
           <a:xfrm>
-            <a:off x="9408160" y="3733800"/>
-            <a:ext cx="3219450" cy="342900"/>
+            <a:off x="9408160" y="3454400"/>
+            <a:ext cx="3219450" cy="304800"/>
           </a:xfrm>
           <a:prstGeom prst="rect">
             <a:avLst/>
@@ -22881,8 +22881,8 @@
         </p:nvSpPr>
         <p:spPr>
           <a:xfrm>
-            <a:off x="1153160" y="4076700"/>
-            <a:ext cx="1651000" cy="342900"/>
+            <a:off x="1153160" y="3759200"/>
+            <a:ext cx="1651000" cy="304800"/>
           </a:xfrm>
           <a:prstGeom prst="rect">
             <a:avLst/>
@@ -22939,8 +22939,8 @@
         </p:nvSpPr>
         <p:spPr>
           <a:xfrm>
-            <a:off x="2804160" y="4076700"/>
-            <a:ext cx="6604000" cy="342900"/>
+            <a:off x="2804160" y="3759200"/>
+            <a:ext cx="6604000" cy="304800"/>
           </a:xfrm>
           <a:prstGeom prst="rect">
             <a:avLst/>
@@ -22997,8 +22997,8 @@
         </p:nvSpPr>
         <p:spPr>
           <a:xfrm>
-            <a:off x="9408160" y="4076700"/>
-            <a:ext cx="3219450" cy="342900"/>
+            <a:off x="9408160" y="3759200"/>
+            <a:ext cx="3219450" cy="304800"/>
           </a:xfrm>
           <a:prstGeom prst="rect">
             <a:avLst/>
@@ -23055,8 +23055,8 @@
         </p:nvSpPr>
         <p:spPr>
           <a:xfrm>
-            <a:off x="1153160" y="4419600"/>
-            <a:ext cx="1651000" cy="342900"/>
+            <a:off x="1153160" y="4064000"/>
+            <a:ext cx="1651000" cy="304800"/>
           </a:xfrm>
           <a:prstGeom prst="rect">
             <a:avLst/>
@@ -23113,8 +23113,8 @@
         </p:nvSpPr>
         <p:spPr>
           <a:xfrm>
-            <a:off x="2804160" y="4419600"/>
-            <a:ext cx="6604000" cy="342900"/>
+            <a:off x="2804160" y="4064000"/>
+            <a:ext cx="6604000" cy="304800"/>
           </a:xfrm>
           <a:prstGeom prst="rect">
             <a:avLst/>
@@ -23172,8 +23172,8 @@
         </p:nvSpPr>
         <p:spPr>
           <a:xfrm>
-            <a:off x="9408160" y="4419600"/>
-            <a:ext cx="3219450" cy="342900"/>
+            <a:off x="9408160" y="4064000"/>
+            <a:ext cx="3219450" cy="304800"/>
           </a:xfrm>
           <a:prstGeom prst="rect">
             <a:avLst/>
@@ -23230,8 +23230,8 @@
         </p:nvSpPr>
         <p:spPr>
           <a:xfrm>
-            <a:off x="1153160" y="4762500"/>
-            <a:ext cx="1651000" cy="342900"/>
+            <a:off x="1153160" y="4368800"/>
+            <a:ext cx="1651000" cy="304800"/>
           </a:xfrm>
           <a:prstGeom prst="rect">
             <a:avLst/>
@@ -23288,8 +23288,8 @@
         </p:nvSpPr>
         <p:spPr>
           <a:xfrm>
-            <a:off x="2804160" y="4762500"/>
-            <a:ext cx="6604000" cy="342900"/>
+            <a:off x="2804160" y="4368800"/>
+            <a:ext cx="6604000" cy="304800"/>
           </a:xfrm>
           <a:prstGeom prst="rect">
             <a:avLst/>
@@ -23347,8 +23347,8 @@
         </p:nvSpPr>
         <p:spPr>
           <a:xfrm>
-            <a:off x="9408160" y="4762500"/>
-            <a:ext cx="3219450" cy="342900"/>
+            <a:off x="9408160" y="4368800"/>
+            <a:ext cx="3219450" cy="304800"/>
           </a:xfrm>
           <a:prstGeom prst="rect">
             <a:avLst/>
@@ -23405,8 +23405,8 @@
         </p:nvSpPr>
         <p:spPr>
           <a:xfrm>
-            <a:off x="1153160" y="5105400"/>
-            <a:ext cx="1651000" cy="342900"/>
+            <a:off x="1153160" y="4673600"/>
+            <a:ext cx="1651000" cy="304800"/>
           </a:xfrm>
           <a:prstGeom prst="rect">
             <a:avLst/>
@@ -23450,7 +23450,7 @@
                   <a:srgbClr val="003E6E"/>
                 </a:solidFill>
               </a:rPr>
-              <a:t>GR2, GR5</a:t>
+              <a:t>GR15</a:t>
             </a:r>
           </a:p>
         </p:txBody>
@@ -23463,8 +23463,8 @@
         </p:nvSpPr>
         <p:spPr>
           <a:xfrm>
-            <a:off x="2804160" y="5105400"/>
-            <a:ext cx="6604000" cy="342900"/>
+            <a:off x="2804160" y="4673600"/>
+            <a:ext cx="6604000" cy="304800"/>
           </a:xfrm>
           <a:prstGeom prst="rect">
             <a:avLst/>
@@ -23508,7 +23508,7 @@
                   <a:srgbClr val="404040"/>
                 </a:solidFill>
               </a:rPr>
-              <a:t>Prüfung in fn_ausleihe_starten und _beenden</a:t>
+              <a:t>Constraint-Trigger: zählt Räder gegen Stellplätze</a:t>
             </a:r>
           </a:p>
         </p:txBody>
@@ -23521,8 +23521,8 @@
         </p:nvSpPr>
         <p:spPr>
           <a:xfrm>
-            <a:off x="9408160" y="5105400"/>
-            <a:ext cx="3219450" cy="342900"/>
+            <a:off x="9408160" y="4673600"/>
+            <a:ext cx="3219450" cy="304800"/>
           </a:xfrm>
           <a:prstGeom prst="rect">
             <a:avLst/>
@@ -23566,7 +23566,7 @@
                   <a:srgbClr val="404040"/>
                 </a:solidFill>
               </a:rPr>
-              <a:t>nur über die Funktion</a:t>
+              <a:t>immer</a:t>
             </a:r>
           </a:p>
         </p:txBody>
@@ -23579,8 +23579,8 @@
         </p:nvSpPr>
         <p:spPr>
           <a:xfrm>
-            <a:off x="1153160" y="5448300"/>
-            <a:ext cx="1651000" cy="342900"/>
+            <a:off x="1153160" y="4978400"/>
+            <a:ext cx="1651000" cy="304800"/>
           </a:xfrm>
           <a:prstGeom prst="rect">
             <a:avLst/>
@@ -23624,7 +23624,7 @@
                   <a:srgbClr val="003E6E"/>
                 </a:solidFill>
               </a:rPr>
-              <a:t>GR8, GR9</a:t>
+              <a:t>GR2, GR5</a:t>
             </a:r>
           </a:p>
         </p:txBody>
@@ -23637,8 +23637,8 @@
         </p:nvSpPr>
         <p:spPr>
           <a:xfrm>
-            <a:off x="2804160" y="5448300"/>
-            <a:ext cx="6604000" cy="342900"/>
+            <a:off x="2804160" y="4978400"/>
+            <a:ext cx="6604000" cy="304800"/>
           </a:xfrm>
           <a:prstGeom prst="rect">
             <a:avLst/>
@@ -23682,7 +23682,7 @@
                   <a:srgbClr val="404040"/>
                 </a:solidFill>
               </a:rPr>
-              <a:t>Prüfung in der api_-Schicht</a:t>
+              <a:t>Prüfung in fn_ausleihe_starten und _beenden</a:t>
             </a:r>
           </a:p>
         </p:txBody>
@@ -23695,8 +23695,8 @@
         </p:nvSpPr>
         <p:spPr>
           <a:xfrm>
-            <a:off x="9408160" y="5448300"/>
-            <a:ext cx="3219450" cy="342900"/>
+            <a:off x="9408160" y="4978400"/>
+            <a:ext cx="3219450" cy="304800"/>
           </a:xfrm>
           <a:prstGeom prst="rect">
             <a:avLst/>
@@ -23753,8 +23753,8 @@
         </p:nvSpPr>
         <p:spPr>
           <a:xfrm>
-            <a:off x="1153160" y="5791200"/>
-            <a:ext cx="1651000" cy="342900"/>
+            <a:off x="1153160" y="5283200"/>
+            <a:ext cx="1651000" cy="304800"/>
           </a:xfrm>
           <a:prstGeom prst="rect">
             <a:avLst/>
@@ -23798,7 +23798,7 @@
                   <a:srgbClr val="003E6E"/>
                 </a:solidFill>
               </a:rPr>
-              <a:t>GR12</a:t>
+              <a:t>GR8, GR9</a:t>
             </a:r>
           </a:p>
         </p:txBody>
@@ -23811,8 +23811,8 @@
         </p:nvSpPr>
         <p:spPr>
           <a:xfrm>
-            <a:off x="2804160" y="5791200"/>
-            <a:ext cx="6604000" cy="342900"/>
+            <a:off x="2804160" y="5283200"/>
+            <a:ext cx="6604000" cy="304800"/>
           </a:xfrm>
           <a:prstGeom prst="rect">
             <a:avLst/>
@@ -23856,7 +23856,7 @@
                   <a:srgbClr val="404040"/>
                 </a:solidFill>
               </a:rPr>
-              <a:t>Prüfung in fn_ausleihe_starten</a:t>
+              <a:t>Prüfung in der api_-Schicht</a:t>
             </a:r>
           </a:p>
         </p:txBody>
@@ -23869,8 +23869,356 @@
         </p:nvSpPr>
         <p:spPr>
           <a:xfrm>
-            <a:off x="9408160" y="5791200"/>
-            <a:ext cx="3219450" cy="342900"/>
+            <a:off x="9408160" y="5283200"/>
+            <a:ext cx="3219450" cy="304800"/>
+          </a:xfrm>
+          <a:prstGeom prst="rect">
+            <a:avLst/>
+          </a:prstGeom>
+          <a:solidFill>
+            <a:srgbClr val="E3DED1"/>
+          </a:solidFill>
+          <a:ln w="6350">
+            <a:solidFill>
+              <a:srgbClr val="C9C3B4"/>
+            </a:solidFill>
+          </a:ln>
+          <a:effectLst/>
+        </p:spPr>
+        <p:style>
+          <a:lnRef idx="1">
+            <a:schemeClr val="accent1"/>
+          </a:lnRef>
+          <a:fillRef idx="3">
+            <a:schemeClr val="accent1"/>
+          </a:fillRef>
+          <a:effectRef idx="2">
+            <a:schemeClr val="accent1"/>
+          </a:effectRef>
+          <a:fontRef idx="minor">
+            <a:schemeClr val="lt1"/>
+          </a:fontRef>
+        </p:style>
+        <p:txBody>
+          <a:bodyPr rtlCol="0" anchor="ctr" wrap="square" lIns="101600" tIns="38100" rIns="101600" bIns="38100"/>
+          <a:lstStyle/>
+          <a:p>
+            <a:pPr algn="l">
+              <a:lnSpc>
+                <a:spcPct val="95000"/>
+              </a:lnSpc>
+            </a:pPr>
+            <a:r>
+              <a:rPr sz="1300" b="0">
+                <a:solidFill>
+                  <a:srgbClr val="404040"/>
+                </a:solidFill>
+              </a:rPr>
+              <a:t>nur über die Funktion</a:t>
+            </a:r>
+          </a:p>
+        </p:txBody>
+      </p:sp>
+      <p:sp>
+        <p:nvSpPr>
+          <p:cNvPr id="39" name="Rectangle 38"/>
+          <p:cNvSpPr/>
+          <p:nvPr/>
+        </p:nvSpPr>
+        <p:spPr>
+          <a:xfrm>
+            <a:off x="1153160" y="5588000"/>
+            <a:ext cx="1651000" cy="304800"/>
+          </a:xfrm>
+          <a:prstGeom prst="rect">
+            <a:avLst/>
+          </a:prstGeom>
+          <a:solidFill>
+            <a:srgbClr val="F7F5EF"/>
+          </a:solidFill>
+          <a:ln w="6350">
+            <a:solidFill>
+              <a:srgbClr val="C9C3B4"/>
+            </a:solidFill>
+          </a:ln>
+          <a:effectLst/>
+        </p:spPr>
+        <p:style>
+          <a:lnRef idx="1">
+            <a:schemeClr val="accent1"/>
+          </a:lnRef>
+          <a:fillRef idx="3">
+            <a:schemeClr val="accent1"/>
+          </a:fillRef>
+          <a:effectRef idx="2">
+            <a:schemeClr val="accent1"/>
+          </a:effectRef>
+          <a:fontRef idx="minor">
+            <a:schemeClr val="lt1"/>
+          </a:fontRef>
+        </p:style>
+        <p:txBody>
+          <a:bodyPr rtlCol="0" anchor="ctr" wrap="square" lIns="101600" tIns="38100" rIns="101600" bIns="38100"/>
+          <a:lstStyle/>
+          <a:p>
+            <a:pPr algn="l">
+              <a:lnSpc>
+                <a:spcPct val="95000"/>
+              </a:lnSpc>
+            </a:pPr>
+            <a:r>
+              <a:rPr sz="1300" b="1">
+                <a:solidFill>
+                  <a:srgbClr val="003E6E"/>
+                </a:solidFill>
+              </a:rPr>
+              <a:t>GR12</a:t>
+            </a:r>
+          </a:p>
+        </p:txBody>
+      </p:sp>
+      <p:sp>
+        <p:nvSpPr>
+          <p:cNvPr id="40" name="Rectangle 39"/>
+          <p:cNvSpPr/>
+          <p:nvPr/>
+        </p:nvSpPr>
+        <p:spPr>
+          <a:xfrm>
+            <a:off x="2804160" y="5588000"/>
+            <a:ext cx="6604000" cy="304800"/>
+          </a:xfrm>
+          <a:prstGeom prst="rect">
+            <a:avLst/>
+          </a:prstGeom>
+          <a:solidFill>
+            <a:srgbClr val="F7F5EF"/>
+          </a:solidFill>
+          <a:ln w="6350">
+            <a:solidFill>
+              <a:srgbClr val="C9C3B4"/>
+            </a:solidFill>
+          </a:ln>
+          <a:effectLst/>
+        </p:spPr>
+        <p:style>
+          <a:lnRef idx="1">
+            <a:schemeClr val="accent1"/>
+          </a:lnRef>
+          <a:fillRef idx="3">
+            <a:schemeClr val="accent1"/>
+          </a:fillRef>
+          <a:effectRef idx="2">
+            <a:schemeClr val="accent1"/>
+          </a:effectRef>
+          <a:fontRef idx="minor">
+            <a:schemeClr val="lt1"/>
+          </a:fontRef>
+        </p:style>
+        <p:txBody>
+          <a:bodyPr rtlCol="0" anchor="ctr" wrap="square" lIns="101600" tIns="38100" rIns="101600" bIns="38100"/>
+          <a:lstStyle/>
+          <a:p>
+            <a:pPr algn="l">
+              <a:lnSpc>
+                <a:spcPct val="95000"/>
+              </a:lnSpc>
+            </a:pPr>
+            <a:r>
+              <a:rPr sz="1300" b="0">
+                <a:solidFill>
+                  <a:srgbClr val="404040"/>
+                </a:solidFill>
+              </a:rPr>
+              <a:t>Prüfung in fn_ausleihe_starten</a:t>
+            </a:r>
+          </a:p>
+        </p:txBody>
+      </p:sp>
+      <p:sp>
+        <p:nvSpPr>
+          <p:cNvPr id="41" name="Rectangle 40"/>
+          <p:cNvSpPr/>
+          <p:nvPr/>
+        </p:nvSpPr>
+        <p:spPr>
+          <a:xfrm>
+            <a:off x="9408160" y="5588000"/>
+            <a:ext cx="3219450" cy="304800"/>
+          </a:xfrm>
+          <a:prstGeom prst="rect">
+            <a:avLst/>
+          </a:prstGeom>
+          <a:solidFill>
+            <a:srgbClr val="F7F5EF"/>
+          </a:solidFill>
+          <a:ln w="6350">
+            <a:solidFill>
+              <a:srgbClr val="C9C3B4"/>
+            </a:solidFill>
+          </a:ln>
+          <a:effectLst/>
+        </p:spPr>
+        <p:style>
+          <a:lnRef idx="1">
+            <a:schemeClr val="accent1"/>
+          </a:lnRef>
+          <a:fillRef idx="3">
+            <a:schemeClr val="accent1"/>
+          </a:fillRef>
+          <a:effectRef idx="2">
+            <a:schemeClr val="accent1"/>
+          </a:effectRef>
+          <a:fontRef idx="minor">
+            <a:schemeClr val="lt1"/>
+          </a:fontRef>
+        </p:style>
+        <p:txBody>
+          <a:bodyPr rtlCol="0" anchor="ctr" wrap="square" lIns="101600" tIns="38100" rIns="101600" bIns="38100"/>
+          <a:lstStyle/>
+          <a:p>
+            <a:pPr algn="l">
+              <a:lnSpc>
+                <a:spcPct val="95000"/>
+              </a:lnSpc>
+            </a:pPr>
+            <a:r>
+              <a:rPr sz="1300" b="0">
+                <a:solidFill>
+                  <a:srgbClr val="404040"/>
+                </a:solidFill>
+              </a:rPr>
+              <a:t>nur über die Funktion</a:t>
+            </a:r>
+          </a:p>
+        </p:txBody>
+      </p:sp>
+      <p:sp>
+        <p:nvSpPr>
+          <p:cNvPr id="42" name="Rectangle 41"/>
+          <p:cNvSpPr/>
+          <p:nvPr/>
+        </p:nvSpPr>
+        <p:spPr>
+          <a:xfrm>
+            <a:off x="1153160" y="5892800"/>
+            <a:ext cx="1651000" cy="304800"/>
+          </a:xfrm>
+          <a:prstGeom prst="rect">
+            <a:avLst/>
+          </a:prstGeom>
+          <a:solidFill>
+            <a:srgbClr val="E3DED1"/>
+          </a:solidFill>
+          <a:ln w="6350">
+            <a:solidFill>
+              <a:srgbClr val="C9C3B4"/>
+            </a:solidFill>
+          </a:ln>
+          <a:effectLst/>
+        </p:spPr>
+        <p:style>
+          <a:lnRef idx="1">
+            <a:schemeClr val="accent1"/>
+          </a:lnRef>
+          <a:fillRef idx="3">
+            <a:schemeClr val="accent1"/>
+          </a:fillRef>
+          <a:effectRef idx="2">
+            <a:schemeClr val="accent1"/>
+          </a:effectRef>
+          <a:fontRef idx="minor">
+            <a:schemeClr val="lt1"/>
+          </a:fontRef>
+        </p:style>
+        <p:txBody>
+          <a:bodyPr rtlCol="0" anchor="ctr" wrap="square" lIns="101600" tIns="38100" rIns="101600" bIns="38100"/>
+          <a:lstStyle/>
+          <a:p>
+            <a:pPr algn="l">
+              <a:lnSpc>
+                <a:spcPct val="95000"/>
+              </a:lnSpc>
+            </a:pPr>
+            <a:r>
+              <a:rPr sz="1300" b="1">
+                <a:solidFill>
+                  <a:srgbClr val="003E6E"/>
+                </a:solidFill>
+              </a:rPr>
+              <a:t>GR14</a:t>
+            </a:r>
+          </a:p>
+        </p:txBody>
+      </p:sp>
+      <p:sp>
+        <p:nvSpPr>
+          <p:cNvPr id="43" name="Rectangle 42"/>
+          <p:cNvSpPr/>
+          <p:nvPr/>
+        </p:nvSpPr>
+        <p:spPr>
+          <a:xfrm>
+            <a:off x="2804160" y="5892800"/>
+            <a:ext cx="6604000" cy="304800"/>
+          </a:xfrm>
+          <a:prstGeom prst="rect">
+            <a:avLst/>
+          </a:prstGeom>
+          <a:solidFill>
+            <a:srgbClr val="E3DED1"/>
+          </a:solidFill>
+          <a:ln w="6350">
+            <a:solidFill>
+              <a:srgbClr val="C9C3B4"/>
+            </a:solidFill>
+          </a:ln>
+          <a:effectLst/>
+        </p:spPr>
+        <p:style>
+          <a:lnRef idx="1">
+            <a:schemeClr val="accent1"/>
+          </a:lnRef>
+          <a:fillRef idx="3">
+            <a:schemeClr val="accent1"/>
+          </a:fillRef>
+          <a:effectRef idx="2">
+            <a:schemeClr val="accent1"/>
+          </a:effectRef>
+          <a:fontRef idx="minor">
+            <a:schemeClr val="lt1"/>
+          </a:fontRef>
+        </p:style>
+        <p:txBody>
+          <a:bodyPr rtlCol="0" anchor="ctr" wrap="square" lIns="101600" tIns="38100" rIns="101600" bIns="38100"/>
+          <a:lstStyle/>
+          <a:p>
+            <a:pPr algn="l">
+              <a:lnSpc>
+                <a:spcPct val="95000"/>
+              </a:lnSpc>
+            </a:pPr>
+            <a:r>
+              <a:rPr sz="1300" b="0">
+                <a:solidFill>
+                  <a:srgbClr val="404040"/>
+                </a:solidFill>
+              </a:rPr>
+              <a:t>fn_im_geschaeftsgebiet in fn_ausleihe_beenden</a:t>
+            </a:r>
+          </a:p>
+        </p:txBody>
+      </p:sp>
+      <p:sp>
+        <p:nvSpPr>
+          <p:cNvPr id="44" name="Rectangle 43"/>
+          <p:cNvSpPr/>
+          <p:nvPr/>
+        </p:nvSpPr>
+        <p:spPr>
+          <a:xfrm>
+            <a:off x="9408160" y="5892800"/>
+            <a:ext cx="3219450" cy="304800"/>
           </a:xfrm>
           <a:prstGeom prst="rect">
             <a:avLst/>

--- a/slides/velocity-datenbankentwurf.pptx
+++ b/slides/velocity-datenbankentwurf.pptx
@@ -29824,7 +29824,7 @@
                   <a:srgbClr val="404040"/>
                 </a:solidFill>
               </a:rPr>
-              <a:t>6,20 liegt unter der Obergrenze 15,00</a:t>
+              <a:t>6,20 liegt unter der Obergrenze 50,00</a:t>
             </a:r>
           </a:p>
         </p:txBody>
@@ -36932,7 +36932,7 @@
                   <a:srgbClr val="404040"/>
                 </a:solidFill>
               </a:rPr>
-              <a:t>E-Cargo Loader, bis 100 kg Zuladung</a:t>
+              <a:t>E-Cargo Loader, bis 75 kg Zuladung</a:t>
             </a:r>
           </a:p>
         </p:txBody>
